--- a/dist/초1/기술·가정/생활자립/초1_기술·가정_생활자립_01_내물건정리와집안일_학생용.pptx
+++ b/dist/초1/기술·가정/생활자립/초1_기술·가정_생활자립_01_내물건정리와집안일_학생용.pptx
@@ -114,34 +114,34 @@
   <p:extLst>
     <p:ext uri="{521415D9-36F7-43E2-AB2F-B90AF26B5E84}">
       <p14:sectionLst xmlns:p14="http://schemas.microsoft.com/office/powerpoint/2010/main">
-        <p14:section name="도입" id="{d2f42411-8f7f-1076-b58f-1065a2fefed6}">
+        <p14:section name="도입" id="{5b08168e-0d56-0eaf-fd18-daf85e839cad}">
           <p14:sldIdLst>
             <p14:sldId id="256"/>
             <p14:sldId id="257"/>
           </p14:sldIdLst>
         </p14:section>
-        <p14:section name="개념" id="{962f85b7-920a-c9a5-e699-28ef2816939b}">
+        <p14:section name="개념" id="{5fa14b2e-5007-a04a-ea4c-d99cd12b81a0}">
           <p14:sldIdLst>
             <p14:sldId id="258"/>
           </p14:sldIdLst>
         </p14:section>
-        <p14:section name="연습" id="{9731d54c-109f-f320-4525-8f2f22827962}">
+        <p14:section name="연습" id="{20ca89e9-c2ec-7cf2-8a18-a3b01d5e69dc}">
           <p14:sldIdLst>
             <p14:sldId id="259"/>
             <p14:sldId id="260"/>
           </p14:sldIdLst>
         </p14:section>
-        <p14:section name="확인" id="{f6813e38-b7ca-9345-7f84-c83846898bc3}">
+        <p14:section name="확인" id="{b63c1141-a0b2-a9d6-fced-89d3923e06dd}">
           <p14:sldIdLst>
             <p14:sldId id="261"/>
           </p14:sldIdLst>
         </p14:section>
-        <p14:section name="정리" id="{91ad0ef9-02ff-b95e-945c-63f38d271b31}">
+        <p14:section name="정리" id="{a28f56b7-ad11-41db-a6fb-a04956e298e4}">
           <p14:sldIdLst>
             <p14:sldId id="262"/>
           </p14:sldIdLst>
         </p14:section>
-        <p14:section name="보충" id="{eac3a5c2-7372-485f-c49b-3c35dc88e1da}">
+        <p14:section name="보충" id="{641d6c47-8b63-dfb0-d321-5d285c7eaf93}">
           <p14:sldIdLst>
             <p14:sldId id="263"/>
           </p14:sldIdLst>
